--- a/assemblies-and-events/world-mental-health-day/downloads/World_Mental_Health_Day_Assembly.pptx
+++ b/assemblies-and-events/world-mental-health-day/downloads/World_Mental_Health_Day_Assembly.pptx
@@ -4257,7 +4257,7 @@
                 </a:solidFill>
                 <a:latin typeface="Karla"/>
               </a:rPr>
-              <a:t>Nothing happens without talking to you first. You will not be marched into anything.</a:t>
+              <a:t>We will always tell you what happens next. You will not be marched into anything.</a:t>
             </a:r>
           </a:p>
         </p:txBody>

--- a/assemblies-and-events/world-mental-health-day/downloads/World_Mental_Health_Day_Assembly.pptx
+++ b/assemblies-and-events/world-mental-health-day/downloads/World_Mental_Health_Day_Assembly.pptx
@@ -3197,11 +3197,11 @@
               </a:spcAft>
             </a:pPr>
             <a:r>
-              <a:rPr sz="4400" b="1" i="0">
+              <a:rPr sz="4400" b="0" i="0">
                 <a:solidFill>
                   <a:srgbClr val="2C6D5B"/>
                 </a:solidFill>
-                <a:latin typeface="Libre Caslon Display"/>
+                <a:latin typeface="Georgia"/>
               </a:rPr>
               <a:t>World Mental Health Day</a:t>
             </a:r>
@@ -3287,7 +3287,7 @@
                 <a:solidFill>
                   <a:srgbClr val="677974"/>
                 </a:solidFill>
-                <a:latin typeface="Karla"/>
+                <a:latin typeface="Calibri"/>
               </a:rPr>
               <a:t>An Assembly, a Week and a Lesson</a:t>
             </a:r>
@@ -3329,7 +3329,7 @@
                 <a:solidFill>
                   <a:srgbClr val="A1AFAC"/>
                 </a:solidFill>
-                <a:latin typeface="Karla"/>
+                <a:latin typeface="Calibri"/>
               </a:rPr>
               <a:t>[ DATE ]</a:t>
             </a:r>
@@ -3395,7 +3395,7 @@
                 <a:solidFill>
                   <a:srgbClr val="A1AFAC"/>
                 </a:solidFill>
-                <a:latin typeface="Karla"/>
+                <a:latin typeface="Calibri"/>
               </a:rPr>
               <a:t>The Pastoral Guide</a:t>
             </a:r>
@@ -3437,7 +3437,7 @@
                 <a:solidFill>
                   <a:srgbClr val="A1AFAC"/>
                 </a:solidFill>
-                <a:latin typeface="Karla"/>
+                <a:latin typeface="Calibri"/>
               </a:rPr>
               <a:t>1 / 11</a:t>
             </a:r>
@@ -3541,7 +3541,7 @@
                 <a:solidFill>
                   <a:srgbClr val="2C6D5B"/>
                 </a:solidFill>
-                <a:latin typeface="Karla"/>
+                <a:latin typeface="Calibri"/>
               </a:rPr>
               <a:t>ONE MORE THING</a:t>
             </a:r>
@@ -3579,11 +3579,11 @@
               </a:spcAft>
             </a:pPr>
             <a:r>
-              <a:rPr sz="3200" b="1" i="0">
+              <a:rPr sz="3200" b="0" i="0">
                 <a:solidFill>
                   <a:srgbClr val="3C4945"/>
                 </a:solidFill>
-                <a:latin typeface="Libre Caslon Display"/>
+                <a:latin typeface="Georgia"/>
               </a:rPr>
               <a:t>If this week is about you</a:t>
             </a:r>
@@ -3625,7 +3625,7 @@
                 <a:solidFill>
                   <a:srgbClr val="677974"/>
                 </a:solidFill>
-                <a:latin typeface="Karla"/>
+                <a:latin typeface="Calibri"/>
               </a:rPr>
               <a:t>You do not need a reason ready, and you do not have to know what to call it.</a:t>
             </a:r>
@@ -3775,11 +3775,11 @@
               </a:spcAft>
             </a:pPr>
             <a:r>
-              <a:rPr sz="1350" b="1" i="0">
+              <a:rPr sz="1350" b="0" i="0">
                 <a:solidFill>
                   <a:srgbClr val="2C6D5B"/>
                 </a:solidFill>
-                <a:latin typeface="Libre Caslon Display"/>
+                <a:latin typeface="Georgia"/>
               </a:rPr>
               <a:t>Your form tutor</a:t>
             </a:r>
@@ -3821,7 +3821,7 @@
                 <a:solidFill>
                   <a:srgbClr val="677974"/>
                 </a:solidFill>
-                <a:latin typeface="Karla"/>
+                <a:latin typeface="Calibri"/>
               </a:rPr>
               <a:t>Any morning, before anything else starts.</a:t>
             </a:r>
@@ -3971,11 +3971,11 @@
               </a:spcAft>
             </a:pPr>
             <a:r>
-              <a:rPr sz="1350" b="1" i="0">
+              <a:rPr sz="1350" b="0" i="0">
                 <a:solidFill>
                   <a:srgbClr val="2C6D5B"/>
                 </a:solidFill>
-                <a:latin typeface="Libre Caslon Display"/>
+                <a:latin typeface="Georgia"/>
               </a:rPr>
               <a:t>[ NAMED STAFF ]</a:t>
             </a:r>
@@ -4017,7 +4017,7 @@
                 <a:solidFill>
                   <a:srgbClr val="677974"/>
                 </a:solidFill>
-                <a:latin typeface="Karla"/>
+                <a:latin typeface="Calibri"/>
               </a:rPr>
               <a:t>Ask at reception and they will find them for you.</a:t>
             </a:r>
@@ -4167,11 +4167,11 @@
               </a:spcAft>
             </a:pPr>
             <a:r>
-              <a:rPr sz="1350" b="1" i="0">
+              <a:rPr sz="1350" b="0" i="0">
                 <a:solidFill>
                   <a:srgbClr val="2C6D5B"/>
                 </a:solidFill>
-                <a:latin typeface="Libre Caslon Display"/>
+                <a:latin typeface="Georgia"/>
               </a:rPr>
               <a:t>[ REPORTING ROUTE ]</a:t>
             </a:r>
@@ -4213,7 +4213,7 @@
                 <a:solidFill>
                   <a:srgbClr val="677974"/>
                 </a:solidFill>
-                <a:latin typeface="Karla"/>
+                <a:latin typeface="Calibri"/>
               </a:rPr>
               <a:t>If you would rather not say it out loud.</a:t>
             </a:r>
@@ -4255,7 +4255,7 @@
                 <a:solidFill>
                   <a:srgbClr val="2C6D5B"/>
                 </a:solidFill>
-                <a:latin typeface="Karla"/>
+                <a:latin typeface="Calibri"/>
               </a:rPr>
               <a:t>We will always tell you what happens next. You will not be marched into anything.</a:t>
             </a:r>
@@ -4321,7 +4321,7 @@
                 <a:solidFill>
                   <a:srgbClr val="A1AFAC"/>
                 </a:solidFill>
-                <a:latin typeface="Karla"/>
+                <a:latin typeface="Calibri"/>
               </a:rPr>
               <a:t>The Pastoral Guide</a:t>
             </a:r>
@@ -4363,7 +4363,7 @@
                 <a:solidFill>
                   <a:srgbClr val="A1AFAC"/>
                 </a:solidFill>
-                <a:latin typeface="Karla"/>
+                <a:latin typeface="Calibri"/>
               </a:rPr>
               <a:t>10 / 11</a:t>
             </a:r>
@@ -4487,11 +4487,11 @@
               </a:spcAft>
             </a:pPr>
             <a:r>
-              <a:rPr sz="3200" b="1" i="0">
+              <a:rPr sz="3200" b="0" i="0">
                 <a:solidFill>
                   <a:srgbClr val="2C6D5B"/>
                 </a:solidFill>
-                <a:latin typeface="Libre Caslon Display"/>
+                <a:latin typeface="Georgia"/>
               </a:rPr>
               <a:t>Ask somebody how they are.</a:t>
             </a:r>
@@ -4533,7 +4533,7 @@
                 <a:solidFill>
                   <a:srgbClr val="677974"/>
                 </a:solidFill>
-                <a:latin typeface="Karla"/>
+                <a:latin typeface="Calibri"/>
               </a:rPr>
               <a:t>You do not need the right words and you do not need a reason. Next week just makes it easier to start.</a:t>
             </a:r>
@@ -4575,7 +4575,7 @@
                 <a:solidFill>
                   <a:srgbClr val="A1AFAC"/>
                 </a:solidFill>
-                <a:latin typeface="Karla"/>
+                <a:latin typeface="Calibri"/>
               </a:rPr>
               <a:t>World Mental Health Day  ·  An Assembly, a Week and a Lesson</a:t>
             </a:r>
@@ -4641,7 +4641,7 @@
                 <a:solidFill>
                   <a:srgbClr val="A1AFAC"/>
                 </a:solidFill>
-                <a:latin typeface="Karla"/>
+                <a:latin typeface="Calibri"/>
               </a:rPr>
               <a:t>The Pastoral Guide</a:t>
             </a:r>
@@ -4683,7 +4683,7 @@
                 <a:solidFill>
                   <a:srgbClr val="A1AFAC"/>
                 </a:solidFill>
-                <a:latin typeface="Karla"/>
+                <a:latin typeface="Calibri"/>
               </a:rPr>
               <a:t>11 / 11</a:t>
             </a:r>
@@ -4800,7 +4800,7 @@
                 <a:solidFill>
                   <a:srgbClr val="2C6D5B"/>
                 </a:solidFill>
-                <a:latin typeface="Karla"/>
+                <a:latin typeface="Calibri"/>
               </a:rPr>
               <a:t>TEACHER SLIDE  ·  SKIP IT</a:t>
             </a:r>
@@ -4838,11 +4838,11 @@
               </a:spcAft>
             </a:pPr>
             <a:r>
-              <a:rPr sz="3000" b="1" i="0">
+              <a:rPr sz="3000" b="0" i="0">
                 <a:solidFill>
                   <a:srgbClr val="3C4945"/>
                 </a:solidFill>
-                <a:latin typeface="Libre Caslon Display"/>
+                <a:latin typeface="Georgia"/>
               </a:rPr>
               <a:t>Two ways to run the week</a:t>
             </a:r>
@@ -4884,7 +4884,7 @@
                 <a:solidFill>
                   <a:srgbClr val="677974"/>
                 </a:solidFill>
-                <a:latin typeface="Karla"/>
+                <a:latin typeface="Calibri"/>
               </a:rPr>
               <a:t>Pick one before the assembly. Everything else in this deck is the same whichever you choose.</a:t>
             </a:r>
@@ -5014,7 +5014,7 @@
                 <a:solidFill>
                   <a:srgbClr val="FFFDF7"/>
                 </a:solidFill>
-                <a:latin typeface="Karla"/>
+                <a:latin typeface="Calibri"/>
               </a:rPr>
               <a:t>1</a:t>
             </a:r>
@@ -5052,11 +5052,11 @@
               </a:spcAft>
             </a:pPr>
             <a:r>
-              <a:rPr sz="1300" b="1" i="0">
+              <a:rPr sz="1300" b="0" i="0">
                 <a:solidFill>
                   <a:srgbClr val="2C6D5B"/>
                 </a:solidFill>
-                <a:latin typeface="Libre Caslon Display"/>
+                <a:latin typeface="Georgia"/>
               </a:rPr>
               <a:t>Option one: Five Ways to Wellbeing. Show slides 6 and 7.</a:t>
             </a:r>
@@ -5098,7 +5098,7 @@
                 <a:solidFill>
                   <a:srgbClr val="677974"/>
                 </a:solidFill>
-                <a:latin typeface="Karla"/>
+                <a:latin typeface="Calibri"/>
               </a:rPr>
               <a:t>A different activity every lunchtime. More to organise, and it gets more students involved.</a:t>
             </a:r>
@@ -5228,7 +5228,7 @@
                 <a:solidFill>
                   <a:srgbClr val="FFFDF7"/>
                 </a:solidFill>
-                <a:latin typeface="Karla"/>
+                <a:latin typeface="Calibri"/>
               </a:rPr>
               <a:t>2</a:t>
             </a:r>
@@ -5266,11 +5266,11 @@
               </a:spcAft>
             </a:pPr>
             <a:r>
-              <a:rPr sz="1300" b="1" i="0">
+              <a:rPr sz="1300" b="0" i="0">
                 <a:solidFill>
                   <a:srgbClr val="2C6D5B"/>
                 </a:solidFill>
-                <a:latin typeface="Libre Caslon Display"/>
+                <a:latin typeface="Georgia"/>
               </a:rPr>
               <a:t>Option two: the Wall of Words. Show slides 8 and 9.</a:t>
             </a:r>
@@ -5312,7 +5312,7 @@
                 <a:solidFill>
                   <a:srgbClr val="677974"/>
                 </a:solidFill>
-                <a:latin typeface="Karla"/>
+                <a:latin typeface="Calibri"/>
               </a:rPr>
               <a:t>One wall that fills up all week. Hardly anything to set up, and it stays up after Friday.</a:t>
             </a:r>
@@ -5442,7 +5442,7 @@
                 <a:solidFill>
                   <a:srgbClr val="FFFDF7"/>
                 </a:solidFill>
-                <a:latin typeface="Karla"/>
+                <a:latin typeface="Calibri"/>
               </a:rPr>
               <a:t>3</a:t>
             </a:r>
@@ -5480,11 +5480,11 @@
               </a:spcAft>
             </a:pPr>
             <a:r>
-              <a:rPr sz="1300" b="1" i="0">
+              <a:rPr sz="1300" b="0" i="0">
                 <a:solidFill>
                   <a:srgbClr val="2C6D5B"/>
                 </a:solidFill>
-                <a:latin typeface="Libre Caslon Display"/>
+                <a:latin typeface="Georgia"/>
               </a:rPr>
               <a:t>Both, if you have the staff for it. Show all four.</a:t>
             </a:r>
@@ -5526,7 +5526,7 @@
                 <a:solidFill>
                   <a:srgbClr val="677974"/>
                 </a:solidFill>
-                <a:latin typeface="Karla"/>
+                <a:latin typeface="Calibri"/>
               </a:rPr>
               <a:t>The wall goes up on Monday morning and the five lunchtimes run alongside it.</a:t>
             </a:r>
@@ -5568,7 +5568,7 @@
                 <a:solidFill>
                   <a:srgbClr val="677974"/>
                 </a:solidFill>
-                <a:latin typeface="Karla"/>
+                <a:latin typeface="Calibri"/>
               </a:rPr>
               <a:t>Hide the slides you are not using, and fill in everything in square brackets before you start.</a:t>
             </a:r>
@@ -5634,7 +5634,7 @@
                 <a:solidFill>
                   <a:srgbClr val="A1AFAC"/>
                 </a:solidFill>
-                <a:latin typeface="Karla"/>
+                <a:latin typeface="Calibri"/>
               </a:rPr>
               <a:t>The Pastoral Guide</a:t>
             </a:r>
@@ -5676,7 +5676,7 @@
                 <a:solidFill>
                   <a:srgbClr val="A1AFAC"/>
                 </a:solidFill>
-                <a:latin typeface="Karla"/>
+                <a:latin typeface="Calibri"/>
               </a:rPr>
               <a:t>2 / 11</a:t>
             </a:r>
@@ -5776,11 +5776,11 @@
               </a:spcAft>
             </a:pPr>
             <a:r>
-              <a:rPr sz="2800" b="1" i="0">
+              <a:rPr sz="2800" b="0" i="0">
                 <a:solidFill>
                   <a:srgbClr val="FFFDF7"/>
                 </a:solidFill>
-                <a:latin typeface="Libre Caslon Display"/>
+                <a:latin typeface="Georgia"/>
               </a:rPr>
               <a:t>Most people here have had a week</a:t>
             </a:r>
@@ -5798,11 +5798,11 @@
               </a:spcAft>
             </a:pPr>
             <a:r>
-              <a:rPr sz="2800" b="1" i="0">
+              <a:rPr sz="2800" b="0" i="0">
                 <a:solidFill>
                   <a:srgbClr val="FFFDF7"/>
                 </a:solidFill>
-                <a:latin typeface="Libre Caslon Display"/>
+                <a:latin typeface="Georgia"/>
               </a:rPr>
               <a:t>they never told anybody about.</a:t>
             </a:r>
@@ -5888,7 +5888,7 @@
                 <a:solidFill>
                   <a:srgbClr val="BEDAD3"/>
                 </a:solidFill>
-                <a:latin typeface="Karla"/>
+                <a:latin typeface="Calibri"/>
               </a:rPr>
               <a:t>Nothing dramatic. You were fine in lessons and less fine at home, and it was easier not to say anything about it.</a:t>
             </a:r>
@@ -5954,7 +5954,7 @@
                 <a:solidFill>
                   <a:srgbClr val="BEDAD3"/>
                 </a:solidFill>
-                <a:latin typeface="Karla"/>
+                <a:latin typeface="Calibri"/>
               </a:rPr>
               <a:t>The Pastoral Guide</a:t>
             </a:r>
@@ -5996,7 +5996,7 @@
                 <a:solidFill>
                   <a:srgbClr val="BEDAD3"/>
                 </a:solidFill>
-                <a:latin typeface="Karla"/>
+                <a:latin typeface="Calibri"/>
               </a:rPr>
               <a:t>3 / 11</a:t>
             </a:r>
@@ -6100,7 +6100,7 @@
                 <a:solidFill>
                   <a:srgbClr val="2C6D5B"/>
                 </a:solidFill>
-                <a:latin typeface="Karla"/>
+                <a:latin typeface="Calibri"/>
               </a:rPr>
               <a:t>WHAT THE DAY IS</a:t>
             </a:r>
@@ -6138,11 +6138,11 @@
               </a:spcAft>
             </a:pPr>
             <a:r>
-              <a:rPr sz="3200" b="1" i="0">
+              <a:rPr sz="3200" b="0" i="0">
                 <a:solidFill>
                   <a:srgbClr val="3C4945"/>
                 </a:solidFill>
-                <a:latin typeface="Libre Caslon Display"/>
+                <a:latin typeface="Georgia"/>
               </a:rPr>
               <a:t>World Mental Health Day</a:t>
             </a:r>
@@ -6184,7 +6184,7 @@
                 <a:solidFill>
                   <a:srgbClr val="677974"/>
                 </a:solidFill>
-                <a:latin typeface="Karla"/>
+                <a:latin typeface="Calibri"/>
               </a:rPr>
               <a:t>The tenth of October, every year, in about a hundred and fifty countries. This year it falls on a Saturday, so we are marking it today and then all of next week.</a:t>
             </a:r>
@@ -6266,11 +6266,11 @@
               </a:spcAft>
             </a:pPr>
             <a:r>
-              <a:rPr sz="2200" b="1" i="0">
+              <a:rPr sz="2200" b="0" i="0">
                 <a:solidFill>
                   <a:srgbClr val="2C6D5B"/>
                 </a:solidFill>
-                <a:latin typeface="Libre Caslon Display"/>
+                <a:latin typeface="Georgia"/>
               </a:rPr>
               <a:t>“Lived experiences heard:</a:t>
             </a:r>
@@ -6278,11 +6278,11 @@
               <a:rPr lang="en-GB"/>
             </a:br>
             <a:r>
-              <a:rPr sz="2200" b="1" i="0">
+              <a:rPr sz="2200" b="0" i="0">
                 <a:solidFill>
                   <a:srgbClr val="2C6D5B"/>
                 </a:solidFill>
-                <a:latin typeface="Libre Caslon Display"/>
+                <a:latin typeface="Georgia"/>
               </a:rPr>
               <a:t>real voices, real change.”</a:t>
             </a:r>
@@ -6324,7 +6324,7 @@
                 <a:solidFill>
                   <a:srgbClr val="327B68"/>
                 </a:solidFill>
-                <a:latin typeface="Karla"/>
+                <a:latin typeface="Calibri"/>
               </a:rPr>
               <a:t>This year’s theme, set by the World Federation for Mental Health.</a:t>
             </a:r>
@@ -6366,7 +6366,7 @@
                 <a:solidFill>
                   <a:srgbClr val="677974"/>
                 </a:solidFill>
-                <a:latin typeface="Karla"/>
+                <a:latin typeface="Calibri"/>
               </a:rPr>
               <a:t>It means listening to people properly, instead of trying to fix them or handing them advice they did not ask for.</a:t>
             </a:r>
@@ -6432,7 +6432,7 @@
                 <a:solidFill>
                   <a:srgbClr val="A1AFAC"/>
                 </a:solidFill>
-                <a:latin typeface="Karla"/>
+                <a:latin typeface="Calibri"/>
               </a:rPr>
               <a:t>The Pastoral Guide</a:t>
             </a:r>
@@ -6474,7 +6474,7 @@
                 <a:solidFill>
                   <a:srgbClr val="A1AFAC"/>
                 </a:solidFill>
-                <a:latin typeface="Karla"/>
+                <a:latin typeface="Calibri"/>
               </a:rPr>
               <a:t>4 / 11</a:t>
             </a:r>
@@ -6578,7 +6578,7 @@
                 <a:solidFill>
                   <a:srgbClr val="2C6D5B"/>
                 </a:solidFill>
-                <a:latin typeface="Karla"/>
+                <a:latin typeface="Calibri"/>
               </a:rPr>
               <a:t>WHAT LISTENING ACTUALLY LOOKS LIKE</a:t>
             </a:r>
@@ -6616,11 +6616,11 @@
               </a:spcAft>
             </a:pPr>
             <a:r>
-              <a:rPr sz="3200" b="1" i="0">
+              <a:rPr sz="3200" b="0" i="0">
                 <a:solidFill>
                   <a:srgbClr val="3C4945"/>
                 </a:solidFill>
-                <a:latin typeface="Libre Caslon Display"/>
+                <a:latin typeface="Georgia"/>
               </a:rPr>
               <a:t>What helps</a:t>
             </a:r>
@@ -6770,11 +6770,11 @@
               </a:spcAft>
             </a:pPr>
             <a:r>
-              <a:rPr sz="1350" b="1" i="0">
+              <a:rPr sz="1350" b="0" i="0">
                 <a:solidFill>
                   <a:srgbClr val="2C6D5B"/>
                 </a:solidFill>
-                <a:latin typeface="Libre Caslon Display"/>
+                <a:latin typeface="Georgia"/>
               </a:rPr>
               <a:t>Notice out loud</a:t>
             </a:r>
@@ -6816,7 +6816,7 @@
                 <a:solidFill>
                   <a:srgbClr val="677974"/>
                 </a:solidFill>
-                <a:latin typeface="Karla"/>
+                <a:latin typeface="Calibri"/>
               </a:rPr>
               <a:t>“You have been quiet this week” gets a real answer. “You alright?” gets “yeah”.</a:t>
             </a:r>
@@ -6966,11 +6966,11 @@
               </a:spcAft>
             </a:pPr>
             <a:r>
-              <a:rPr sz="1350" b="1" i="0">
+              <a:rPr sz="1350" b="0" i="0">
                 <a:solidFill>
                   <a:srgbClr val="2C6D5B"/>
                 </a:solidFill>
-                <a:latin typeface="Libre Caslon Display"/>
+                <a:latin typeface="Georgia"/>
               </a:rPr>
               <a:t>Ask twice</a:t>
             </a:r>
@@ -7012,7 +7012,7 @@
                 <a:solidFill>
                   <a:srgbClr val="677974"/>
                 </a:solidFill>
-                <a:latin typeface="Karla"/>
+                <a:latin typeface="Calibri"/>
               </a:rPr>
               <a:t>The first answer is nearly always “I’m fine”. Ask again, and ask it differently.</a:t>
             </a:r>
@@ -7162,11 +7162,11 @@
               </a:spcAft>
             </a:pPr>
             <a:r>
-              <a:rPr sz="1350" b="1" i="0">
+              <a:rPr sz="1350" b="0" i="0">
                 <a:solidFill>
                   <a:srgbClr val="2C6D5B"/>
                 </a:solidFill>
-                <a:latin typeface="Libre Caslon Display"/>
+                <a:latin typeface="Georgia"/>
               </a:rPr>
               <a:t>Listen without fixing</a:t>
             </a:r>
@@ -7208,7 +7208,7 @@
                 <a:solidFill>
                   <a:srgbClr val="677974"/>
                 </a:solidFill>
-                <a:latin typeface="Karla"/>
+                <a:latin typeface="Calibri"/>
               </a:rPr>
               <a:t>You do not have to solve anything. Most people just want somebody to hear it.</a:t>
             </a:r>
@@ -7250,7 +7250,7 @@
                 <a:solidFill>
                   <a:srgbClr val="677974"/>
                 </a:solidFill>
-                <a:latin typeface="Karla"/>
+                <a:latin typeface="Calibri"/>
               </a:rPr>
               <a:t>None of that needs training. It just needs one person to go first.</a:t>
             </a:r>
@@ -7316,7 +7316,7 @@
                 <a:solidFill>
                   <a:srgbClr val="A1AFAC"/>
                 </a:solidFill>
-                <a:latin typeface="Karla"/>
+                <a:latin typeface="Calibri"/>
               </a:rPr>
               <a:t>The Pastoral Guide</a:t>
             </a:r>
@@ -7358,7 +7358,7 @@
                 <a:solidFill>
                   <a:srgbClr val="A1AFAC"/>
                 </a:solidFill>
-                <a:latin typeface="Karla"/>
+                <a:latin typeface="Calibri"/>
               </a:rPr>
               <a:t>5 / 11</a:t>
             </a:r>
@@ -7475,7 +7475,7 @@
                 <a:solidFill>
                   <a:srgbClr val="2C6D5B"/>
                 </a:solidFill>
-                <a:latin typeface="Karla"/>
+                <a:latin typeface="Calibri"/>
               </a:rPr>
               <a:t>OPTION ONE</a:t>
             </a:r>
@@ -7513,11 +7513,11 @@
               </a:spcAft>
             </a:pPr>
             <a:r>
-              <a:rPr sz="3000" b="1" i="0">
+              <a:rPr sz="3000" b="0" i="0">
                 <a:solidFill>
                   <a:srgbClr val="3C4945"/>
                 </a:solidFill>
-                <a:latin typeface="Libre Caslon Display"/>
+                <a:latin typeface="Georgia"/>
               </a:rPr>
               <a:t>Next week, day by day</a:t>
             </a:r>
@@ -7603,7 +7603,7 @@
                 <a:solidFill>
                   <a:srgbClr val="327B68"/>
                 </a:solidFill>
-                <a:latin typeface="Karla"/>
+                <a:latin typeface="Calibri"/>
               </a:rPr>
               <a:t>MONDAY</a:t>
             </a:r>
@@ -7709,11 +7709,11 @@
               </a:spcAft>
             </a:pPr>
             <a:r>
-              <a:rPr sz="1350" b="1" i="0">
+              <a:rPr sz="1350" b="0" i="0">
                 <a:solidFill>
                   <a:srgbClr val="2C6D5B"/>
                 </a:solidFill>
-                <a:latin typeface="Libre Caslon Display"/>
+                <a:latin typeface="Georgia"/>
               </a:rPr>
               <a:t>Tea and Talk</a:t>
             </a:r>
@@ -7799,7 +7799,7 @@
                 <a:solidFill>
                   <a:srgbClr val="327B68"/>
                 </a:solidFill>
-                <a:latin typeface="Karla"/>
+                <a:latin typeface="Calibri"/>
               </a:rPr>
               <a:t>TUESDAY</a:t>
             </a:r>
@@ -7905,11 +7905,11 @@
               </a:spcAft>
             </a:pPr>
             <a:r>
-              <a:rPr sz="1350" b="1" i="0">
+              <a:rPr sz="1350" b="0" i="0">
                 <a:solidFill>
                   <a:srgbClr val="2C6D5B"/>
                 </a:solidFill>
-                <a:latin typeface="Libre Caslon Display"/>
+                <a:latin typeface="Georgia"/>
               </a:rPr>
               <a:t>Laps at Lunch</a:t>
             </a:r>
@@ -7995,7 +7995,7 @@
                 <a:solidFill>
                   <a:srgbClr val="327B68"/>
                 </a:solidFill>
-                <a:latin typeface="Karla"/>
+                <a:latin typeface="Calibri"/>
               </a:rPr>
               <a:t>WEDNESDAY</a:t>
             </a:r>
@@ -8101,11 +8101,11 @@
               </a:spcAft>
             </a:pPr>
             <a:r>
-              <a:rPr sz="1350" b="1" i="0">
+              <a:rPr sz="1350" b="0" i="0">
                 <a:solidFill>
                   <a:srgbClr val="2C6D5B"/>
                 </a:solidFill>
-                <a:latin typeface="Libre Caslon Display"/>
+                <a:latin typeface="Georgia"/>
               </a:rPr>
               <a:t>The Quiet Room</a:t>
             </a:r>
@@ -8191,7 +8191,7 @@
                 <a:solidFill>
                   <a:srgbClr val="327B68"/>
                 </a:solidFill>
-                <a:latin typeface="Karla"/>
+                <a:latin typeface="Calibri"/>
               </a:rPr>
               <a:t>THURSDAY</a:t>
             </a:r>
@@ -8297,11 +8297,11 @@
               </a:spcAft>
             </a:pPr>
             <a:r>
-              <a:rPr sz="1350" b="1" i="0">
+              <a:rPr sz="1350" b="0" i="0">
                 <a:solidFill>
                   <a:srgbClr val="2C6D5B"/>
                 </a:solidFill>
-                <a:latin typeface="Libre Caslon Display"/>
+                <a:latin typeface="Georgia"/>
               </a:rPr>
               <a:t>Ask Me Anything</a:t>
             </a:r>
@@ -8387,7 +8387,7 @@
                 <a:solidFill>
                   <a:srgbClr val="327B68"/>
                 </a:solidFill>
-                <a:latin typeface="Karla"/>
+                <a:latin typeface="Calibri"/>
               </a:rPr>
               <a:t>FRIDAY</a:t>
             </a:r>
@@ -8493,11 +8493,11 @@
               </a:spcAft>
             </a:pPr>
             <a:r>
-              <a:rPr sz="1350" b="1" i="0">
+              <a:rPr sz="1350" b="0" i="0">
                 <a:solidFill>
                   <a:srgbClr val="2C6D5B"/>
                 </a:solidFill>
-                <a:latin typeface="Libre Caslon Display"/>
+                <a:latin typeface="Georgia"/>
               </a:rPr>
               <a:t>Green Ribbons</a:t>
             </a:r>
@@ -8539,7 +8539,7 @@
                 <a:solidFill>
                   <a:srgbClr val="677974"/>
                 </a:solidFill>
-                <a:latin typeface="Karla"/>
+                <a:latin typeface="Calibri"/>
               </a:rPr>
               <a:t>One every lunchtime, all next week. Come to all five, come to one, or just walk past and look.</a:t>
             </a:r>
@@ -8605,7 +8605,7 @@
                 <a:solidFill>
                   <a:srgbClr val="A1AFAC"/>
                 </a:solidFill>
-                <a:latin typeface="Karla"/>
+                <a:latin typeface="Calibri"/>
               </a:rPr>
               <a:t>The Pastoral Guide</a:t>
             </a:r>
@@ -8647,7 +8647,7 @@
                 <a:solidFill>
                   <a:srgbClr val="A1AFAC"/>
                 </a:solidFill>
-                <a:latin typeface="Karla"/>
+                <a:latin typeface="Calibri"/>
               </a:rPr>
               <a:t>6 / 11</a:t>
             </a:r>
@@ -8764,7 +8764,7 @@
                 <a:solidFill>
                   <a:srgbClr val="2C6D5B"/>
                 </a:solidFill>
-                <a:latin typeface="Karla"/>
+                <a:latin typeface="Calibri"/>
               </a:rPr>
               <a:t>OPTION ONE</a:t>
             </a:r>
@@ -8802,11 +8802,11 @@
               </a:spcAft>
             </a:pPr>
             <a:r>
-              <a:rPr sz="3000" b="1" i="0">
+              <a:rPr sz="3000" b="0" i="0">
                 <a:solidFill>
                   <a:srgbClr val="3C4945"/>
                 </a:solidFill>
-                <a:latin typeface="Libre Caslon Display"/>
+                <a:latin typeface="Georgia"/>
               </a:rPr>
               <a:t>Where to find them</a:t>
             </a:r>
@@ -8936,7 +8936,7 @@
                 <a:solidFill>
                   <a:srgbClr val="FFFDF7"/>
                 </a:solidFill>
-                <a:latin typeface="Karla"/>
+                <a:latin typeface="Calibri"/>
               </a:rPr>
               <a:t>1</a:t>
             </a:r>
@@ -8974,11 +8974,11 @@
               </a:spcAft>
             </a:pPr>
             <a:r>
-              <a:rPr sz="1300" b="1" i="0">
+              <a:rPr sz="1300" b="0" i="0">
                 <a:solidFill>
                   <a:srgbClr val="2C6D5B"/>
                 </a:solidFill>
-                <a:latin typeface="Libre Caslon Display"/>
+                <a:latin typeface="Georgia"/>
               </a:rPr>
               <a:t>[ PLACE ], every lunchtime</a:t>
             </a:r>
@@ -9020,7 +9020,7 @@
                 <a:solidFill>
                   <a:srgbClr val="677974"/>
                 </a:solidFill>
-                <a:latin typeface="Karla"/>
+                <a:latin typeface="Calibri"/>
               </a:rPr>
               <a:t>The same room all week, so you only have to remember it once.</a:t>
             </a:r>
@@ -9150,7 +9150,7 @@
                 <a:solidFill>
                   <a:srgbClr val="FFFDF7"/>
                 </a:solidFill>
-                <a:latin typeface="Karla"/>
+                <a:latin typeface="Calibri"/>
               </a:rPr>
               <a:t>2</a:t>
             </a:r>
@@ -9188,11 +9188,11 @@
               </a:spcAft>
             </a:pPr>
             <a:r>
-              <a:rPr sz="1300" b="1" i="0">
+              <a:rPr sz="1300" b="0" i="0">
                 <a:solidFill>
                   <a:srgbClr val="2C6D5B"/>
                 </a:solidFill>
-                <a:latin typeface="Libre Caslon Display"/>
+                <a:latin typeface="Georgia"/>
               </a:rPr>
               <a:t>Run by [ WHO ]</a:t>
             </a:r>
@@ -9234,7 +9234,7 @@
                 <a:solidFill>
                   <a:srgbClr val="677974"/>
                 </a:solidFill>
-                <a:latin typeface="Karla"/>
+                <a:latin typeface="Calibri"/>
               </a:rPr>
               <a:t>Ask any of them if you would rather help run one than just turn up.</a:t>
             </a:r>
@@ -9364,7 +9364,7 @@
                 <a:solidFill>
                   <a:srgbClr val="FFFDF7"/>
                 </a:solidFill>
-                <a:latin typeface="Karla"/>
+                <a:latin typeface="Calibri"/>
               </a:rPr>
               <a:t>3</a:t>
             </a:r>
@@ -9402,11 +9402,11 @@
               </a:spcAft>
             </a:pPr>
             <a:r>
-              <a:rPr sz="1300" b="1" i="0">
+              <a:rPr sz="1300" b="0" i="0">
                 <a:solidFill>
                   <a:srgbClr val="2C6D5B"/>
                 </a:solidFill>
-                <a:latin typeface="Libre Caslon Display"/>
+                <a:latin typeface="Georgia"/>
               </a:rPr>
               <a:t>The question box opens on Monday</a:t>
             </a:r>
@@ -9448,7 +9448,7 @@
                 <a:solidFill>
                   <a:srgbClr val="677974"/>
                 </a:solidFill>
-                <a:latin typeface="Karla"/>
+                <a:latin typeface="Calibri"/>
               </a:rPr>
               <a:t>Write a question, put it in the box, and the answers go up on a board on Thursday.</a:t>
             </a:r>
@@ -9490,7 +9490,7 @@
                 <a:solidFill>
                   <a:srgbClr val="677974"/>
                 </a:solidFill>
-                <a:latin typeface="Karla"/>
+                <a:latin typeface="Calibri"/>
               </a:rPr>
               <a:t>You do not have to sign in and you do not have to stay.</a:t>
             </a:r>
@@ -9556,7 +9556,7 @@
                 <a:solidFill>
                   <a:srgbClr val="A1AFAC"/>
                 </a:solidFill>
-                <a:latin typeface="Karla"/>
+                <a:latin typeface="Calibri"/>
               </a:rPr>
               <a:t>The Pastoral Guide</a:t>
             </a:r>
@@ -9598,7 +9598,7 @@
                 <a:solidFill>
                   <a:srgbClr val="A1AFAC"/>
                 </a:solidFill>
-                <a:latin typeface="Karla"/>
+                <a:latin typeface="Calibri"/>
               </a:rPr>
               <a:t>7 / 11</a:t>
             </a:r>
@@ -9715,7 +9715,7 @@
                 <a:solidFill>
                   <a:srgbClr val="2C6D5B"/>
                 </a:solidFill>
-                <a:latin typeface="Karla"/>
+                <a:latin typeface="Calibri"/>
               </a:rPr>
               <a:t>OPTION TWO</a:t>
             </a:r>
@@ -9753,11 +9753,11 @@
               </a:spcAft>
             </a:pPr>
             <a:r>
-              <a:rPr sz="3200" b="1" i="0">
+              <a:rPr sz="3200" b="0" i="0">
                 <a:solidFill>
                   <a:srgbClr val="3C4945"/>
                 </a:solidFill>
-                <a:latin typeface="Libre Caslon Display"/>
+                <a:latin typeface="Georgia"/>
               </a:rPr>
               <a:t>The Wall of Words</a:t>
             </a:r>
@@ -9843,7 +9843,7 @@
                 <a:solidFill>
                   <a:srgbClr val="2C6D5B"/>
                 </a:solidFill>
-                <a:latin typeface="Karla"/>
+                <a:latin typeface="Calibri"/>
               </a:rPr>
               <a:t>What is happening</a:t>
             </a:r>
@@ -9885,7 +9885,7 @@
                 <a:solidFill>
                   <a:srgbClr val="3C4945"/>
                 </a:solidFill>
-                <a:latin typeface="Karla"/>
+                <a:latin typeface="Calibri"/>
               </a:rPr>
               <a:t>There will be a blank wall in [ PLACE ] all next week, with cards and pens next to it. Write the thing you would want somebody to say to you on a bad day, and pin it up. You do not put your name on it.</a:t>
             </a:r>
@@ -10039,7 +10039,7 @@
                 <a:solidFill>
                   <a:srgbClr val="2C6D5B"/>
                 </a:solidFill>
-                <a:latin typeface="Karla"/>
+                <a:latin typeface="Calibri"/>
               </a:rPr>
               <a:t>[ PLACE ]</a:t>
             </a:r>
@@ -10051,7 +10051,7 @@
                 <a:solidFill>
                   <a:srgbClr val="2C6D5B"/>
                 </a:solidFill>
-                <a:latin typeface="Karla"/>
+                <a:latin typeface="Calibri"/>
               </a:rPr>
               <a:t>Every break and lunchtime</a:t>
             </a:r>
@@ -10093,7 +10093,7 @@
                 <a:solidFill>
                   <a:srgbClr val="677974"/>
                 </a:solidFill>
-                <a:latin typeface="Karla"/>
+                <a:latin typeface="Calibri"/>
               </a:rPr>
               <a:t>By Friday it should be covered. Staff read what goes up, so write something you would be happy for anybody here to read.</a:t>
             </a:r>
@@ -10159,7 +10159,7 @@
                 <a:solidFill>
                   <a:srgbClr val="A1AFAC"/>
                 </a:solidFill>
-                <a:latin typeface="Karla"/>
+                <a:latin typeface="Calibri"/>
               </a:rPr>
               <a:t>The Pastoral Guide</a:t>
             </a:r>
@@ -10201,7 +10201,7 @@
                 <a:solidFill>
                   <a:srgbClr val="A1AFAC"/>
                 </a:solidFill>
-                <a:latin typeface="Karla"/>
+                <a:latin typeface="Calibri"/>
               </a:rPr>
               <a:t>8 / 11</a:t>
             </a:r>
@@ -10318,7 +10318,7 @@
                 <a:solidFill>
                   <a:srgbClr val="2C6D5B"/>
                 </a:solidFill>
-                <a:latin typeface="Karla"/>
+                <a:latin typeface="Calibri"/>
               </a:rPr>
               <a:t>OPTION TWO</a:t>
             </a:r>
@@ -10356,11 +10356,11 @@
               </a:spcAft>
             </a:pPr>
             <a:r>
-              <a:rPr sz="3200" b="1" i="0">
+              <a:rPr sz="3200" b="0" i="0">
                 <a:solidFill>
                   <a:srgbClr val="3C4945"/>
                 </a:solidFill>
-                <a:latin typeface="Libre Caslon Display"/>
+                <a:latin typeface="Georgia"/>
               </a:rPr>
               <a:t>What to write</a:t>
             </a:r>
@@ -10442,11 +10442,11 @@
               </a:spcAft>
             </a:pPr>
             <a:r>
-              <a:rPr sz="1300" b="1" i="0">
+              <a:rPr sz="1300" b="0" i="0">
                 <a:solidFill>
                   <a:srgbClr val="2C6D5B"/>
                 </a:solidFill>
-                <a:latin typeface="Libre Caslon Display"/>
+                <a:latin typeface="Georgia"/>
               </a:rPr>
               <a:t>“You are not being dramatic.”</a:t>
             </a:r>
@@ -10488,7 +10488,7 @@
                 <a:solidFill>
                   <a:srgbClr val="677974"/>
                 </a:solidFill>
-                <a:latin typeface="Karla"/>
+                <a:latin typeface="Calibri"/>
               </a:rPr>
               <a:t>Somebody in this year group needed to hear that this week.</a:t>
             </a:r>
@@ -10570,11 +10570,11 @@
               </a:spcAft>
             </a:pPr>
             <a:r>
-              <a:rPr sz="1300" b="1" i="0">
+              <a:rPr sz="1300" b="0" i="0">
                 <a:solidFill>
                   <a:srgbClr val="2C6D5B"/>
                 </a:solidFill>
-                <a:latin typeface="Libre Caslon Display"/>
+                <a:latin typeface="Georgia"/>
               </a:rPr>
               <a:t>“I am not going anywhere.”</a:t>
             </a:r>
@@ -10616,7 +10616,7 @@
                 <a:solidFill>
                   <a:srgbClr val="677974"/>
                 </a:solidFill>
-                <a:latin typeface="Karla"/>
+                <a:latin typeface="Calibri"/>
               </a:rPr>
               <a:t>Short, and people remember it.</a:t>
             </a:r>
@@ -10698,11 +10698,11 @@
               </a:spcAft>
             </a:pPr>
             <a:r>
-              <a:rPr sz="1300" b="1" i="0">
+              <a:rPr sz="1300" b="0" i="0">
                 <a:solidFill>
                   <a:srgbClr val="2C6D5B"/>
                 </a:solidFill>
-                <a:latin typeface="Libre Caslon Display"/>
+                <a:latin typeface="Georgia"/>
               </a:rPr>
               <a:t>“Tell me properly. I have got time.”</a:t>
             </a:r>
@@ -10744,7 +10744,7 @@
                 <a:solidFill>
                   <a:srgbClr val="677974"/>
                 </a:solidFill>
-                <a:latin typeface="Karla"/>
+                <a:latin typeface="Calibri"/>
               </a:rPr>
               <a:t>Hard to answer with “I’m fine”.</a:t>
             </a:r>
@@ -10786,7 +10786,7 @@
                 <a:solidFill>
                   <a:srgbClr val="677974"/>
                 </a:solidFill>
-                <a:latin typeface="Karla"/>
+                <a:latin typeface="Calibri"/>
               </a:rPr>
               <a:t>Somebody is going to read yours on a bad day, so write it properly.</a:t>
             </a:r>
@@ -10852,7 +10852,7 @@
                 <a:solidFill>
                   <a:srgbClr val="A1AFAC"/>
                 </a:solidFill>
-                <a:latin typeface="Karla"/>
+                <a:latin typeface="Calibri"/>
               </a:rPr>
               <a:t>The Pastoral Guide</a:t>
             </a:r>
@@ -10894,7 +10894,7 @@
                 <a:solidFill>
                   <a:srgbClr val="A1AFAC"/>
                 </a:solidFill>
-                <a:latin typeface="Karla"/>
+                <a:latin typeface="Calibri"/>
               </a:rPr>
               <a:t>9 / 11</a:t>
             </a:r>
